--- a/slides/brc_hazel_week_d2.pptx
+++ b/slides/brc_hazel_week_d2.pptx
@@ -5,26 +5,25 @@
     <p:sldMasterId id="2147483648" r:id="rId1"/>
   </p:sldMasterIdLst>
   <p:notesMasterIdLst>
-    <p:notesMasterId r:id="rId19"/>
+    <p:notesMasterId r:id="rId18"/>
   </p:notesMasterIdLst>
   <p:sldIdLst>
     <p:sldId id="257" r:id="rId2"/>
-    <p:sldId id="301" r:id="rId3"/>
-    <p:sldId id="258" r:id="rId4"/>
-    <p:sldId id="260" r:id="rId5"/>
-    <p:sldId id="302" r:id="rId6"/>
-    <p:sldId id="303" r:id="rId7"/>
-    <p:sldId id="304" r:id="rId8"/>
-    <p:sldId id="305" r:id="rId9"/>
-    <p:sldId id="306" r:id="rId10"/>
-    <p:sldId id="309" r:id="rId11"/>
-    <p:sldId id="307" r:id="rId12"/>
-    <p:sldId id="308" r:id="rId13"/>
-    <p:sldId id="310" r:id="rId14"/>
-    <p:sldId id="313" r:id="rId15"/>
-    <p:sldId id="311" r:id="rId16"/>
-    <p:sldId id="315" r:id="rId17"/>
-    <p:sldId id="314" r:id="rId18"/>
+    <p:sldId id="258" r:id="rId3"/>
+    <p:sldId id="260" r:id="rId4"/>
+    <p:sldId id="302" r:id="rId5"/>
+    <p:sldId id="303" r:id="rId6"/>
+    <p:sldId id="304" r:id="rId7"/>
+    <p:sldId id="305" r:id="rId8"/>
+    <p:sldId id="306" r:id="rId9"/>
+    <p:sldId id="309" r:id="rId10"/>
+    <p:sldId id="307" r:id="rId11"/>
+    <p:sldId id="308" r:id="rId12"/>
+    <p:sldId id="310" r:id="rId13"/>
+    <p:sldId id="313" r:id="rId14"/>
+    <p:sldId id="311" r:id="rId15"/>
+    <p:sldId id="315" r:id="rId16"/>
+    <p:sldId id="314" r:id="rId17"/>
   </p:sldIdLst>
   <p:sldSz cx="12192000" cy="6858000"/>
   <p:notesSz cx="6858000" cy="9144000"/>
@@ -123,6 +122,11 @@
       </a:defRPr>
     </a:lvl9pPr>
   </p:defaultTextStyle>
+  <p:extLst>
+    <p:ext uri="{EFAFB233-063F-42B5-8137-9DF3F51BA10A}">
+      <p15:sldGuideLst xmlns:p15="http://schemas.microsoft.com/office/powerpoint/2012/main"/>
+    </p:ext>
+  </p:extLst>
 </p:presentation>
 </file>
 
@@ -208,7 +212,7 @@
           <a:p>
             <a:fld id="{55347101-66C8-A54A-9D2B-0AF79B0A048C}" type="datetimeFigureOut">
               <a:rPr lang="en-US" smtClean="0"/>
-              <a:t>4/16/26</a:t>
+              <a:t>5/12/26</a:t>
             </a:fld>
             <a:endParaRPr lang="en-US"/>
           </a:p>
@@ -540,7 +544,7 @@
           <a:p>
             <a:fld id="{13FC26C8-C37B-D543-9AB9-4FE91B5DFE38}" type="slidenum">
               <a:rPr lang="en-US" smtClean="0"/>
-              <a:t>3</a:t>
+              <a:t>2</a:t>
             </a:fld>
             <a:endParaRPr lang="en-US"/>
           </a:p>
@@ -648,7 +652,7 @@
           <a:p>
             <a:fld id="{13FC26C8-C37B-D543-9AB9-4FE91B5DFE38}" type="slidenum">
               <a:rPr lang="en-US" smtClean="0"/>
-              <a:t>5</a:t>
+              <a:t>4</a:t>
             </a:fld>
             <a:endParaRPr lang="en-US"/>
           </a:p>
@@ -756,7 +760,7 @@
           <a:p>
             <a:fld id="{13FC26C8-C37B-D543-9AB9-4FE91B5DFE38}" type="slidenum">
               <a:rPr lang="en-US" smtClean="0"/>
-              <a:t>6</a:t>
+              <a:t>5</a:t>
             </a:fld>
             <a:endParaRPr lang="en-US"/>
           </a:p>
@@ -864,7 +868,7 @@
           <a:p>
             <a:fld id="{13FC26C8-C37B-D543-9AB9-4FE91B5DFE38}" type="slidenum">
               <a:rPr lang="en-US" smtClean="0"/>
-              <a:t>7</a:t>
+              <a:t>6</a:t>
             </a:fld>
             <a:endParaRPr lang="en-US"/>
           </a:p>
@@ -1030,7 +1034,7 @@
           <a:p>
             <a:fld id="{EA0E0448-3326-0648-9066-77767DB75E62}" type="datetimeFigureOut">
               <a:rPr lang="en-US" smtClean="0"/>
-              <a:t>4/16/26</a:t>
+              <a:t>5/12/26</a:t>
             </a:fld>
             <a:endParaRPr lang="en-US"/>
           </a:p>
@@ -1228,7 +1232,7 @@
           <a:p>
             <a:fld id="{EA0E0448-3326-0648-9066-77767DB75E62}" type="datetimeFigureOut">
               <a:rPr lang="en-US" smtClean="0"/>
-              <a:t>4/16/26</a:t>
+              <a:t>5/12/26</a:t>
             </a:fld>
             <a:endParaRPr lang="en-US"/>
           </a:p>
@@ -1436,7 +1440,7 @@
           <a:p>
             <a:fld id="{EA0E0448-3326-0648-9066-77767DB75E62}" type="datetimeFigureOut">
               <a:rPr lang="en-US" smtClean="0"/>
-              <a:t>4/16/26</a:t>
+              <a:t>5/12/26</a:t>
             </a:fld>
             <a:endParaRPr lang="en-US"/>
           </a:p>
@@ -1634,7 +1638,7 @@
           <a:p>
             <a:fld id="{EA0E0448-3326-0648-9066-77767DB75E62}" type="datetimeFigureOut">
               <a:rPr lang="en-US" smtClean="0"/>
-              <a:t>4/16/26</a:t>
+              <a:t>5/12/26</a:t>
             </a:fld>
             <a:endParaRPr lang="en-US"/>
           </a:p>
@@ -1909,7 +1913,7 @@
           <a:p>
             <a:fld id="{EA0E0448-3326-0648-9066-77767DB75E62}" type="datetimeFigureOut">
               <a:rPr lang="en-US" smtClean="0"/>
-              <a:t>4/16/26</a:t>
+              <a:t>5/12/26</a:t>
             </a:fld>
             <a:endParaRPr lang="en-US"/>
           </a:p>
@@ -2174,7 +2178,7 @@
           <a:p>
             <a:fld id="{EA0E0448-3326-0648-9066-77767DB75E62}" type="datetimeFigureOut">
               <a:rPr lang="en-US" smtClean="0"/>
-              <a:t>4/16/26</a:t>
+              <a:t>5/12/26</a:t>
             </a:fld>
             <a:endParaRPr lang="en-US"/>
           </a:p>
@@ -2586,7 +2590,7 @@
           <a:p>
             <a:fld id="{EA0E0448-3326-0648-9066-77767DB75E62}" type="datetimeFigureOut">
               <a:rPr lang="en-US" smtClean="0"/>
-              <a:t>4/16/26</a:t>
+              <a:t>5/12/26</a:t>
             </a:fld>
             <a:endParaRPr lang="en-US"/>
           </a:p>
@@ -2727,7 +2731,7 @@
           <a:p>
             <a:fld id="{EA0E0448-3326-0648-9066-77767DB75E62}" type="datetimeFigureOut">
               <a:rPr lang="en-US" smtClean="0"/>
-              <a:t>4/16/26</a:t>
+              <a:t>5/12/26</a:t>
             </a:fld>
             <a:endParaRPr lang="en-US"/>
           </a:p>
@@ -2840,7 +2844,7 @@
           <a:p>
             <a:fld id="{EA0E0448-3326-0648-9066-77767DB75E62}" type="datetimeFigureOut">
               <a:rPr lang="en-US" smtClean="0"/>
-              <a:t>4/16/26</a:t>
+              <a:t>5/12/26</a:t>
             </a:fld>
             <a:endParaRPr lang="en-US"/>
           </a:p>
@@ -3151,7 +3155,7 @@
           <a:p>
             <a:fld id="{EA0E0448-3326-0648-9066-77767DB75E62}" type="datetimeFigureOut">
               <a:rPr lang="en-US" smtClean="0"/>
-              <a:t>4/16/26</a:t>
+              <a:t>5/12/26</a:t>
             </a:fld>
             <a:endParaRPr lang="en-US"/>
           </a:p>
@@ -3439,7 +3443,7 @@
           <a:p>
             <a:fld id="{EA0E0448-3326-0648-9066-77767DB75E62}" type="datetimeFigureOut">
               <a:rPr lang="en-US" smtClean="0"/>
-              <a:t>4/16/26</a:t>
+              <a:t>5/12/26</a:t>
             </a:fld>
             <a:endParaRPr lang="en-US"/>
           </a:p>
@@ -3680,7 +3684,7 @@
           <a:p>
             <a:fld id="{EA0E0448-3326-0648-9066-77767DB75E62}" type="datetimeFigureOut">
               <a:rPr lang="en-US" smtClean="0"/>
-              <a:t>4/16/26</a:t>
+              <a:t>5/12/26</a:t>
             </a:fld>
             <a:endParaRPr lang="en-US"/>
           </a:p>
@@ -4352,437 +4356,6 @@
         <p:cNvPr id="1" name="">
           <a:extLst>
             <a:ext uri="{FF2B5EF4-FFF2-40B4-BE49-F238E27FC236}">
-              <a16:creationId xmlns:a16="http://schemas.microsoft.com/office/drawing/2014/main" id="{3BC51CAB-FAD2-7FF1-BC68-38E813D536B3}"/>
-            </a:ext>
-          </a:extLst>
-        </p:cNvPr>
-        <p:cNvGrpSpPr/>
-        <p:nvPr/>
-      </p:nvGrpSpPr>
-      <p:grpSpPr>
-        <a:xfrm>
-          <a:off x="0" y="0"/>
-          <a:ext cx="0" cy="0"/>
-          <a:chOff x="0" y="0"/>
-          <a:chExt cx="0" cy="0"/>
-        </a:xfrm>
-      </p:grpSpPr>
-      <p:sp>
-        <p:nvSpPr>
-          <p:cNvPr id="4" name="Title 1">
-            <a:extLst>
-              <a:ext uri="{FF2B5EF4-FFF2-40B4-BE49-F238E27FC236}">
-                <a16:creationId xmlns:a16="http://schemas.microsoft.com/office/drawing/2014/main" id="{AAFC316A-7B0B-9218-42CC-A39620399B02}"/>
-              </a:ext>
-            </a:extLst>
-          </p:cNvPr>
-          <p:cNvSpPr>
-            <a:spLocks noGrp="1"/>
-          </p:cNvSpPr>
-          <p:nvPr>
-            <p:ph type="title"/>
-          </p:nvPr>
-        </p:nvSpPr>
-        <p:spPr>
-          <a:xfrm>
-            <a:off x="838200" y="365125"/>
-            <a:ext cx="10515600" cy="1325563"/>
-          </a:xfrm>
-        </p:spPr>
-        <p:txBody>
-          <a:bodyPr>
-            <a:normAutofit/>
-          </a:bodyPr>
-          <a:lstStyle/>
-          <a:p>
-            <a:r>
-              <a:rPr lang="en-US" sz="4000" dirty="0">
-                <a:latin typeface="Helvetica" pitchFamily="2" charset="0"/>
-              </a:rPr>
-              <a:t>Anatomy of the job array</a:t>
-            </a:r>
-          </a:p>
-        </p:txBody>
-      </p:sp>
-      <p:pic>
-        <p:nvPicPr>
-          <p:cNvPr id="5" name="Picture 4">
-            <a:extLst>
-              <a:ext uri="{FF2B5EF4-FFF2-40B4-BE49-F238E27FC236}">
-                <a16:creationId xmlns:a16="http://schemas.microsoft.com/office/drawing/2014/main" id="{B11660AB-6D04-175F-931A-3468DB851DC2}"/>
-              </a:ext>
-            </a:extLst>
-          </p:cNvPr>
-          <p:cNvPicPr>
-            <a:picLocks noChangeAspect="1"/>
-          </p:cNvPicPr>
-          <p:nvPr/>
-        </p:nvPicPr>
-        <p:blipFill>
-          <a:blip r:embed="rId2"/>
-          <a:stretch>
-            <a:fillRect/>
-          </a:stretch>
-        </p:blipFill>
-        <p:spPr>
-          <a:xfrm>
-            <a:off x="363255" y="2066907"/>
-            <a:ext cx="5847443" cy="4033678"/>
-          </a:xfrm>
-          <a:prstGeom prst="rect">
-            <a:avLst/>
-          </a:prstGeom>
-        </p:spPr>
-      </p:pic>
-      <p:pic>
-        <p:nvPicPr>
-          <p:cNvPr id="2050" name="Picture 2" descr="Cook: What it Takes to Make It in a Michelin-Starred Restaurant">
-            <a:extLst>
-              <a:ext uri="{FF2B5EF4-FFF2-40B4-BE49-F238E27FC236}">
-                <a16:creationId xmlns:a16="http://schemas.microsoft.com/office/drawing/2014/main" id="{7FEA96AA-52BF-BE32-FA66-0B1AD763CAC6}"/>
-              </a:ext>
-            </a:extLst>
-          </p:cNvPr>
-          <p:cNvPicPr>
-            <a:picLocks noChangeAspect="1" noChangeArrowheads="1"/>
-          </p:cNvPicPr>
-          <p:nvPr/>
-        </p:nvPicPr>
-        <p:blipFill>
-          <a:blip r:embed="rId3">
-            <a:extLst>
-              <a:ext uri="{28A0092B-C50C-407E-A947-70E740481C1C}">
-                <a14:useLocalDpi xmlns:a14="http://schemas.microsoft.com/office/drawing/2010/main" val="0"/>
-              </a:ext>
-            </a:extLst>
-          </a:blip>
-          <a:srcRect/>
-          <a:stretch>
-            <a:fillRect/>
-          </a:stretch>
-        </p:blipFill>
-        <p:spPr bwMode="auto">
-          <a:xfrm>
-            <a:off x="7310221" y="2293481"/>
-            <a:ext cx="2018047" cy="1135519"/>
-          </a:xfrm>
-          <a:prstGeom prst="rect">
-            <a:avLst/>
-          </a:prstGeom>
-          <a:noFill/>
-          <a:extLst>
-            <a:ext uri="{909E8E84-426E-40DD-AFC4-6F175D3DCCD1}">
-              <a14:hiddenFill xmlns:a14="http://schemas.microsoft.com/office/drawing/2010/main">
-                <a:solidFill>
-                  <a:srgbClr val="FFFFFF"/>
-                </a:solidFill>
-              </a14:hiddenFill>
-            </a:ext>
-          </a:extLst>
-        </p:spPr>
-      </p:pic>
-      <p:pic>
-        <p:nvPicPr>
-          <p:cNvPr id="2052" name="Picture 4" descr="From Home Cook to Haute Cuisine: My Experience Staging in a Michelin-Starred  Kitchen as an Amateur Chef | by Kevinjchen | Medium">
-            <a:extLst>
-              <a:ext uri="{FF2B5EF4-FFF2-40B4-BE49-F238E27FC236}">
-                <a16:creationId xmlns:a16="http://schemas.microsoft.com/office/drawing/2014/main" id="{2D1B33F3-6BA6-FAFE-91B4-0FEE51743972}"/>
-              </a:ext>
-            </a:extLst>
-          </p:cNvPr>
-          <p:cNvPicPr>
-            <a:picLocks noChangeAspect="1" noChangeArrowheads="1"/>
-          </p:cNvPicPr>
-          <p:nvPr/>
-        </p:nvPicPr>
-        <p:blipFill>
-          <a:blip r:embed="rId4">
-            <a:extLst>
-              <a:ext uri="{28A0092B-C50C-407E-A947-70E740481C1C}">
-                <a14:useLocalDpi xmlns:a14="http://schemas.microsoft.com/office/drawing/2010/main" val="0"/>
-              </a:ext>
-            </a:extLst>
-          </a:blip>
-          <a:srcRect/>
-          <a:stretch>
-            <a:fillRect/>
-          </a:stretch>
-        </p:blipFill>
-        <p:spPr bwMode="auto">
-          <a:xfrm>
-            <a:off x="7388361" y="5079051"/>
-            <a:ext cx="1861766" cy="1396325"/>
-          </a:xfrm>
-          <a:prstGeom prst="rect">
-            <a:avLst/>
-          </a:prstGeom>
-          <a:noFill/>
-          <a:extLst>
-            <a:ext uri="{909E8E84-426E-40DD-AFC4-6F175D3DCCD1}">
-              <a14:hiddenFill xmlns:a14="http://schemas.microsoft.com/office/drawing/2010/main">
-                <a:solidFill>
-                  <a:srgbClr val="FFFFFF"/>
-                </a:solidFill>
-              </a14:hiddenFill>
-            </a:ext>
-          </a:extLst>
-        </p:spPr>
-      </p:pic>
-      <p:pic>
-        <p:nvPicPr>
-          <p:cNvPr id="2054" name="Picture 6" descr="Recipe - Free food icons">
-            <a:extLst>
-              <a:ext uri="{FF2B5EF4-FFF2-40B4-BE49-F238E27FC236}">
-                <a16:creationId xmlns:a16="http://schemas.microsoft.com/office/drawing/2014/main" id="{C98011D2-CAD8-7FE0-EC2D-DCF169E6ED16}"/>
-              </a:ext>
-            </a:extLst>
-          </p:cNvPr>
-          <p:cNvPicPr>
-            <a:picLocks noChangeAspect="1" noChangeArrowheads="1"/>
-          </p:cNvPicPr>
-          <p:nvPr/>
-        </p:nvPicPr>
-        <p:blipFill>
-          <a:blip r:embed="rId5">
-            <a:extLst>
-              <a:ext uri="{28A0092B-C50C-407E-A947-70E740481C1C}">
-                <a14:useLocalDpi xmlns:a14="http://schemas.microsoft.com/office/drawing/2010/main" val="0"/>
-              </a:ext>
-            </a:extLst>
-          </a:blip>
-          <a:srcRect/>
-          <a:stretch>
-            <a:fillRect/>
-          </a:stretch>
-        </p:blipFill>
-        <p:spPr bwMode="auto">
-          <a:xfrm>
-            <a:off x="7888836" y="3814153"/>
-            <a:ext cx="860816" cy="860816"/>
-          </a:xfrm>
-          <a:prstGeom prst="rect">
-            <a:avLst/>
-          </a:prstGeom>
-          <a:noFill/>
-          <a:extLst>
-            <a:ext uri="{909E8E84-426E-40DD-AFC4-6F175D3DCCD1}">
-              <a14:hiddenFill xmlns:a14="http://schemas.microsoft.com/office/drawing/2010/main">
-                <a:solidFill>
-                  <a:srgbClr val="FFFFFF"/>
-                </a:solidFill>
-              </a14:hiddenFill>
-            </a:ext>
-          </a:extLst>
-        </p:spPr>
-      </p:pic>
-      <p:sp>
-        <p:nvSpPr>
-          <p:cNvPr id="6" name="TextBox 5">
-            <a:extLst>
-              <a:ext uri="{FF2B5EF4-FFF2-40B4-BE49-F238E27FC236}">
-                <a16:creationId xmlns:a16="http://schemas.microsoft.com/office/drawing/2014/main" id="{7513C32E-83D2-918A-D574-6F8C0A89F532}"/>
-              </a:ext>
-            </a:extLst>
-          </p:cNvPr>
-          <p:cNvSpPr txBox="1"/>
-          <p:nvPr/>
-        </p:nvSpPr>
-        <p:spPr>
-          <a:xfrm>
-            <a:off x="9541056" y="908306"/>
-            <a:ext cx="2597762" cy="369332"/>
-          </a:xfrm>
-          <a:prstGeom prst="rect">
-            <a:avLst/>
-          </a:prstGeom>
-          <a:noFill/>
-        </p:spPr>
-        <p:txBody>
-          <a:bodyPr wrap="none" rtlCol="0">
-            <a:spAutoFit/>
-          </a:bodyPr>
-          <a:lstStyle/>
-          <a:p>
-            <a:r>
-              <a:rPr lang="en-US" dirty="0"/>
-              <a:t>Config (list of ingredients)</a:t>
-            </a:r>
-          </a:p>
-        </p:txBody>
-      </p:sp>
-      <p:sp>
-        <p:nvSpPr>
-          <p:cNvPr id="7" name="TextBox 6">
-            <a:extLst>
-              <a:ext uri="{FF2B5EF4-FFF2-40B4-BE49-F238E27FC236}">
-                <a16:creationId xmlns:a16="http://schemas.microsoft.com/office/drawing/2014/main" id="{84CB02A7-375F-F658-3288-1560DAD0A278}"/>
-              </a:ext>
-            </a:extLst>
-          </p:cNvPr>
-          <p:cNvSpPr txBox="1"/>
-          <p:nvPr/>
-        </p:nvSpPr>
-        <p:spPr>
-          <a:xfrm>
-            <a:off x="9541056" y="2491908"/>
-            <a:ext cx="2175339" cy="369332"/>
-          </a:xfrm>
-          <a:prstGeom prst="rect">
-            <a:avLst/>
-          </a:prstGeom>
-          <a:noFill/>
-        </p:spPr>
-        <p:txBody>
-          <a:bodyPr wrap="none" rtlCol="0">
-            <a:spAutoFit/>
-          </a:bodyPr>
-          <a:lstStyle/>
-          <a:p>
-            <a:r>
-              <a:rPr lang="en-US" dirty="0"/>
-              <a:t>Launcher (head chef)</a:t>
-            </a:r>
-          </a:p>
-        </p:txBody>
-      </p:sp>
-      <p:sp>
-        <p:nvSpPr>
-          <p:cNvPr id="8" name="TextBox 7">
-            <a:extLst>
-              <a:ext uri="{FF2B5EF4-FFF2-40B4-BE49-F238E27FC236}">
-                <a16:creationId xmlns:a16="http://schemas.microsoft.com/office/drawing/2014/main" id="{CAFB727D-65BA-003B-6D9D-51FEA14820E1}"/>
-              </a:ext>
-            </a:extLst>
-          </p:cNvPr>
-          <p:cNvSpPr txBox="1"/>
-          <p:nvPr/>
-        </p:nvSpPr>
-        <p:spPr>
-          <a:xfrm>
-            <a:off x="9541056" y="5445321"/>
-            <a:ext cx="1316001" cy="369332"/>
-          </a:xfrm>
-          <a:prstGeom prst="rect">
-            <a:avLst/>
-          </a:prstGeom>
-          <a:noFill/>
-        </p:spPr>
-        <p:txBody>
-          <a:bodyPr wrap="none" rtlCol="0">
-            <a:spAutoFit/>
-          </a:bodyPr>
-          <a:lstStyle/>
-          <a:p>
-            <a:r>
-              <a:rPr lang="en-US" dirty="0"/>
-              <a:t>Jobs (cooks)</a:t>
-            </a:r>
-          </a:p>
-        </p:txBody>
-      </p:sp>
-      <p:sp>
-        <p:nvSpPr>
-          <p:cNvPr id="9" name="TextBox 8">
-            <a:extLst>
-              <a:ext uri="{FF2B5EF4-FFF2-40B4-BE49-F238E27FC236}">
-                <a16:creationId xmlns:a16="http://schemas.microsoft.com/office/drawing/2014/main" id="{46EF83B4-13A6-98E5-238A-51509D056599}"/>
-              </a:ext>
-            </a:extLst>
-          </p:cNvPr>
-          <p:cNvSpPr txBox="1"/>
-          <p:nvPr/>
-        </p:nvSpPr>
-        <p:spPr>
-          <a:xfrm>
-            <a:off x="9541056" y="4124961"/>
-            <a:ext cx="1847750" cy="369332"/>
-          </a:xfrm>
-          <a:prstGeom prst="rect">
-            <a:avLst/>
-          </a:prstGeom>
-          <a:noFill/>
-        </p:spPr>
-        <p:txBody>
-          <a:bodyPr wrap="none" rtlCol="0">
-            <a:spAutoFit/>
-          </a:bodyPr>
-          <a:lstStyle/>
-          <a:p>
-            <a:r>
-              <a:rPr lang="en-US" dirty="0"/>
-              <a:t>Job script (recipe)</a:t>
-            </a:r>
-          </a:p>
-        </p:txBody>
-      </p:sp>
-      <p:pic>
-        <p:nvPicPr>
-          <p:cNvPr id="2058" name="Picture 10" descr="1,736 Ingredients List Icon Royalty-Free Images, Stock Photos &amp; Pictures |  Shutterstock">
-            <a:extLst>
-              <a:ext uri="{FF2B5EF4-FFF2-40B4-BE49-F238E27FC236}">
-                <a16:creationId xmlns:a16="http://schemas.microsoft.com/office/drawing/2014/main" id="{6BF7B0B8-FB97-67C5-231E-6B5D0D68E510}"/>
-              </a:ext>
-            </a:extLst>
-          </p:cNvPr>
-          <p:cNvPicPr>
-            <a:picLocks noChangeAspect="1" noChangeArrowheads="1"/>
-          </p:cNvPicPr>
-          <p:nvPr/>
-        </p:nvPicPr>
-        <p:blipFill rotWithShape="1">
-          <a:blip r:embed="rId6">
-            <a:extLst>
-              <a:ext uri="{28A0092B-C50C-407E-A947-70E740481C1C}">
-                <a14:useLocalDpi xmlns:a14="http://schemas.microsoft.com/office/drawing/2010/main" val="0"/>
-              </a:ext>
-            </a:extLst>
-          </a:blip>
-          <a:srcRect b="12082"/>
-          <a:stretch>
-            <a:fillRect/>
-          </a:stretch>
-        </p:blipFill>
-        <p:spPr bwMode="auto">
-          <a:xfrm>
-            <a:off x="7544377" y="294257"/>
-            <a:ext cx="1549734" cy="1467298"/>
-          </a:xfrm>
-          <a:prstGeom prst="rect">
-            <a:avLst/>
-          </a:prstGeom>
-          <a:noFill/>
-          <a:extLst>
-            <a:ext uri="{909E8E84-426E-40DD-AFC4-6F175D3DCCD1}">
-              <a14:hiddenFill xmlns:a14="http://schemas.microsoft.com/office/drawing/2010/main">
-                <a:solidFill>
-                  <a:srgbClr val="FFFFFF"/>
-                </a:solidFill>
-              </a14:hiddenFill>
-            </a:ext>
-          </a:extLst>
-        </p:spPr>
-      </p:pic>
-    </p:spTree>
-    <p:extLst>
-      <p:ext uri="{BB962C8B-B14F-4D97-AF65-F5344CB8AC3E}">
-        <p14:creationId xmlns:p14="http://schemas.microsoft.com/office/powerpoint/2010/main" val="1633823878"/>
-      </p:ext>
-    </p:extLst>
-  </p:cSld>
-  <p:clrMapOvr>
-    <a:masterClrMapping/>
-  </p:clrMapOvr>
-</p:sld>
-</file>
-
-<file path=ppt/slides/slide11.xml><?xml version="1.0" encoding="utf-8"?>
-<p:sld xmlns:a="http://schemas.openxmlformats.org/drawingml/2006/main" xmlns:r="http://schemas.openxmlformats.org/officeDocument/2006/relationships" xmlns:p="http://schemas.openxmlformats.org/presentationml/2006/main">
-  <p:cSld>
-    <p:spTree>
-      <p:nvGrpSpPr>
-        <p:cNvPr id="1" name="">
-          <a:extLst>
-            <a:ext uri="{FF2B5EF4-FFF2-40B4-BE49-F238E27FC236}">
               <a16:creationId xmlns:a16="http://schemas.microsoft.com/office/drawing/2014/main" id="{F74C1287-A55E-36F7-C388-ED4D9F179A3D}"/>
             </a:ext>
           </a:extLst>
@@ -5185,7 +4758,7 @@
 </p:sld>
 </file>
 
-<file path=ppt/slides/slide12.xml><?xml version="1.0" encoding="utf-8"?>
+<file path=ppt/slides/slide11.xml><?xml version="1.0" encoding="utf-8"?>
 <p:sld xmlns:a="http://schemas.openxmlformats.org/drawingml/2006/main" xmlns:r="http://schemas.openxmlformats.org/officeDocument/2006/relationships" xmlns:p="http://schemas.openxmlformats.org/presentationml/2006/main">
   <p:cSld>
     <p:spTree>
@@ -6001,7 +5574,7 @@
 </p:sld>
 </file>
 
-<file path=ppt/slides/slide13.xml><?xml version="1.0" encoding="utf-8"?>
+<file path=ppt/slides/slide12.xml><?xml version="1.0" encoding="utf-8"?>
 <p:sld xmlns:a="http://schemas.openxmlformats.org/drawingml/2006/main" xmlns:r="http://schemas.openxmlformats.org/officeDocument/2006/relationships" xmlns:p="http://schemas.openxmlformats.org/presentationml/2006/main">
   <p:cSld>
     <p:spTree>
@@ -6508,7 +6081,7 @@
 </p:sld>
 </file>
 
-<file path=ppt/slides/slide14.xml><?xml version="1.0" encoding="utf-8"?>
+<file path=ppt/slides/slide13.xml><?xml version="1.0" encoding="utf-8"?>
 <p:sld xmlns:a="http://schemas.openxmlformats.org/drawingml/2006/main" xmlns:r="http://schemas.openxmlformats.org/officeDocument/2006/relationships" xmlns:p="http://schemas.openxmlformats.org/presentationml/2006/main">
   <p:cSld>
     <p:spTree>
@@ -7076,7 +6649,7 @@
 </p:sld>
 </file>
 
-<file path=ppt/slides/slide15.xml><?xml version="1.0" encoding="utf-8"?>
+<file path=ppt/slides/slide14.xml><?xml version="1.0" encoding="utf-8"?>
 <p:sld xmlns:a="http://schemas.openxmlformats.org/drawingml/2006/main" xmlns:r="http://schemas.openxmlformats.org/officeDocument/2006/relationships" xmlns:p="http://schemas.openxmlformats.org/presentationml/2006/main">
   <p:cSld>
     <p:spTree>
@@ -7743,7 +7316,7 @@
 </p:sld>
 </file>
 
-<file path=ppt/slides/slide16.xml><?xml version="1.0" encoding="utf-8"?>
+<file path=ppt/slides/slide15.xml><?xml version="1.0" encoding="utf-8"?>
 <p:sld xmlns:a="http://schemas.openxmlformats.org/drawingml/2006/main" xmlns:r="http://schemas.openxmlformats.org/officeDocument/2006/relationships" xmlns:p="http://schemas.openxmlformats.org/presentationml/2006/main">
   <p:cSld>
     <p:spTree>
@@ -7822,6 +7395,99 @@
           </a:p>
         </p:txBody>
       </p:sp>
+      <p:sp>
+        <p:nvSpPr>
+          <p:cNvPr id="2" name="TextBox 1">
+            <a:extLst>
+              <a:ext uri="{FF2B5EF4-FFF2-40B4-BE49-F238E27FC236}">
+                <a16:creationId xmlns:a16="http://schemas.microsoft.com/office/drawing/2014/main" id="{788FDFE4-0F21-AF76-E608-42B767BA1C82}"/>
+              </a:ext>
+            </a:extLst>
+          </p:cNvPr>
+          <p:cNvSpPr txBox="1"/>
+          <p:nvPr/>
+        </p:nvSpPr>
+        <p:spPr>
+          <a:xfrm>
+            <a:off x="1341268" y="2223911"/>
+            <a:ext cx="9509463" cy="1754326"/>
+          </a:xfrm>
+          <a:prstGeom prst="rect">
+            <a:avLst/>
+          </a:prstGeom>
+          <a:noFill/>
+        </p:spPr>
+        <p:txBody>
+          <a:bodyPr wrap="none" rtlCol="0">
+            <a:spAutoFit/>
+          </a:bodyPr>
+          <a:lstStyle/>
+          <a:p>
+            <a:r>
+              <a:rPr lang="en-US" dirty="0"/>
+              <a:t>/rs1/researchers/b/</a:t>
+            </a:r>
+            <a:r>
+              <a:rPr lang="en-US" dirty="0" err="1"/>
+              <a:t>blhurwit</a:t>
+            </a:r>
+            <a:r>
+              <a:rPr lang="en-US" dirty="0"/>
+              <a:t>/users/</a:t>
+            </a:r>
+            <a:r>
+              <a:rPr lang="en-US" dirty="0" err="1"/>
+              <a:t>mtouced</a:t>
+            </a:r>
+            <a:r>
+              <a:rPr lang="en-US" dirty="0"/>
+              <a:t>/</a:t>
+            </a:r>
+            <a:r>
+              <a:rPr lang="en-US" dirty="0" err="1"/>
+              <a:t>brc_hazel_training</a:t>
+            </a:r>
+            <a:r>
+              <a:rPr lang="en-US" dirty="0"/>
+              <a:t>/data/</a:t>
+            </a:r>
+          </a:p>
+          <a:p>
+            <a:endParaRPr lang="en-US" dirty="0"/>
+          </a:p>
+          <a:p>
+            <a:endParaRPr lang="en-US" dirty="0"/>
+          </a:p>
+          <a:p>
+            <a:r>
+              <a:rPr lang="en-US" dirty="0"/>
+              <a:t>/</a:t>
+            </a:r>
+            <a:r>
+              <a:rPr lang="en-US" dirty="0" err="1"/>
+              <a:t>gpfs_backup</a:t>
+            </a:r>
+            <a:r>
+              <a:rPr lang="en-US" dirty="0"/>
+              <a:t>/</a:t>
+            </a:r>
+            <a:r>
+              <a:rPr lang="en-US" dirty="0" err="1"/>
+              <a:t>bioinfo_data</a:t>
+            </a:r>
+            <a:r>
+              <a:rPr lang="en-US" dirty="0"/>
+              <a:t>/containers/images/quay.io_biocontainers_fastqc:0.12.1--hdfd78af_0.sif</a:t>
+            </a:r>
+          </a:p>
+          <a:p>
+            <a:endParaRPr lang="en-US" dirty="0"/>
+          </a:p>
+          <a:p>
+            <a:endParaRPr lang="en-US" dirty="0"/>
+          </a:p>
+        </p:txBody>
+      </p:sp>
     </p:spTree>
     <p:extLst>
       <p:ext uri="{BB962C8B-B14F-4D97-AF65-F5344CB8AC3E}">
@@ -7835,7 +7501,7 @@
 </p:sld>
 </file>
 
-<file path=ppt/slides/slide17.xml><?xml version="1.0" encoding="utf-8"?>
+<file path=ppt/slides/slide16.xml><?xml version="1.0" encoding="utf-8"?>
 <p:sld xmlns:a="http://schemas.openxmlformats.org/drawingml/2006/main" xmlns:r="http://schemas.openxmlformats.org/officeDocument/2006/relationships" xmlns:p="http://schemas.openxmlformats.org/presentationml/2006/main">
   <p:cSld>
     <p:spTree>
@@ -8086,243 +7752,6 @@
 </file>
 
 <file path=ppt/slides/slide2.xml><?xml version="1.0" encoding="utf-8"?>
-<p:sld xmlns:a="http://schemas.openxmlformats.org/drawingml/2006/main" xmlns:r="http://schemas.openxmlformats.org/officeDocument/2006/relationships" xmlns:p="http://schemas.openxmlformats.org/presentationml/2006/main">
-  <p:cSld>
-    <p:spTree>
-      <p:nvGrpSpPr>
-        <p:cNvPr id="1" name="">
-          <a:extLst>
-            <a:ext uri="{FF2B5EF4-FFF2-40B4-BE49-F238E27FC236}">
-              <a16:creationId xmlns:a16="http://schemas.microsoft.com/office/drawing/2014/main" id="{45849598-BD4D-70E9-70C2-7215FDC0508E}"/>
-            </a:ext>
-          </a:extLst>
-        </p:cNvPr>
-        <p:cNvGrpSpPr/>
-        <p:nvPr/>
-      </p:nvGrpSpPr>
-      <p:grpSpPr>
-        <a:xfrm>
-          <a:off x="0" y="0"/>
-          <a:ext cx="0" cy="0"/>
-          <a:chOff x="0" y="0"/>
-          <a:chExt cx="0" cy="0"/>
-        </a:xfrm>
-      </p:grpSpPr>
-      <p:sp>
-        <p:nvSpPr>
-          <p:cNvPr id="2" name="Title 1">
-            <a:extLst>
-              <a:ext uri="{FF2B5EF4-FFF2-40B4-BE49-F238E27FC236}">
-                <a16:creationId xmlns:a16="http://schemas.microsoft.com/office/drawing/2014/main" id="{FFF1D083-096E-849D-8015-B191ED5D6A34}"/>
-              </a:ext>
-            </a:extLst>
-          </p:cNvPr>
-          <p:cNvSpPr>
-            <a:spLocks noGrp="1"/>
-          </p:cNvSpPr>
-          <p:nvPr>
-            <p:ph type="title"/>
-          </p:nvPr>
-        </p:nvSpPr>
-        <p:spPr/>
-        <p:txBody>
-          <a:bodyPr>
-            <a:normAutofit/>
-          </a:bodyPr>
-          <a:lstStyle/>
-          <a:p>
-            <a:r>
-              <a:rPr lang="en-US" sz="4000" dirty="0">
-                <a:latin typeface="Helvetica" pitchFamily="2" charset="0"/>
-              </a:rPr>
-              <a:t>Leave us your feedback!</a:t>
-            </a:r>
-          </a:p>
-        </p:txBody>
-      </p:sp>
-      <p:pic>
-        <p:nvPicPr>
-          <p:cNvPr id="2050" name="Picture 2" descr="Suggestion - Free communications icons">
-            <a:extLst>
-              <a:ext uri="{FF2B5EF4-FFF2-40B4-BE49-F238E27FC236}">
-                <a16:creationId xmlns:a16="http://schemas.microsoft.com/office/drawing/2014/main" id="{5020596A-D3B5-18D2-1D37-3B88E5CD788C}"/>
-              </a:ext>
-            </a:extLst>
-          </p:cNvPr>
-          <p:cNvPicPr>
-            <a:picLocks noChangeAspect="1" noChangeArrowheads="1"/>
-          </p:cNvPicPr>
-          <p:nvPr/>
-        </p:nvPicPr>
-        <p:blipFill>
-          <a:blip r:embed="rId2">
-            <a:extLst>
-              <a:ext uri="{28A0092B-C50C-407E-A947-70E740481C1C}">
-                <a14:useLocalDpi xmlns:a14="http://schemas.microsoft.com/office/drawing/2010/main" val="0"/>
-              </a:ext>
-            </a:extLst>
-          </a:blip>
-          <a:srcRect/>
-          <a:stretch>
-            <a:fillRect/>
-          </a:stretch>
-        </p:blipFill>
-        <p:spPr bwMode="auto">
-          <a:xfrm>
-            <a:off x="1182760" y="1866375"/>
-            <a:ext cx="611909" cy="611909"/>
-          </a:xfrm>
-          <a:prstGeom prst="rect">
-            <a:avLst/>
-          </a:prstGeom>
-          <a:noFill/>
-          <a:extLst>
-            <a:ext uri="{909E8E84-426E-40DD-AFC4-6F175D3DCCD1}">
-              <a14:hiddenFill xmlns:a14="http://schemas.microsoft.com/office/drawing/2010/main">
-                <a:solidFill>
-                  <a:srgbClr val="FFFFFF"/>
-                </a:solidFill>
-              </a14:hiddenFill>
-            </a:ext>
-          </a:extLst>
-        </p:spPr>
-      </p:pic>
-      <p:sp>
-        <p:nvSpPr>
-          <p:cNvPr id="3" name="TextBox 2">
-            <a:extLst>
-              <a:ext uri="{FF2B5EF4-FFF2-40B4-BE49-F238E27FC236}">
-                <a16:creationId xmlns:a16="http://schemas.microsoft.com/office/drawing/2014/main" id="{49C98279-5765-9BFA-2B15-04A8FEDAA130}"/>
-              </a:ext>
-            </a:extLst>
-          </p:cNvPr>
-          <p:cNvSpPr txBox="1"/>
-          <p:nvPr/>
-        </p:nvSpPr>
-        <p:spPr>
-          <a:xfrm>
-            <a:off x="1794669" y="2206232"/>
-            <a:ext cx="6591506" cy="1754326"/>
-          </a:xfrm>
-          <a:prstGeom prst="rect">
-            <a:avLst/>
-          </a:prstGeom>
-          <a:noFill/>
-        </p:spPr>
-        <p:txBody>
-          <a:bodyPr wrap="square" rtlCol="0">
-            <a:spAutoFit/>
-          </a:bodyPr>
-          <a:lstStyle/>
-          <a:p>
-            <a:r>
-              <a:rPr lang="en-US" dirty="0">
-                <a:latin typeface="Helvetica" pitchFamily="2" charset="0"/>
-              </a:rPr>
-              <a:t>Please let us know if you have suggestions!</a:t>
-            </a:r>
-          </a:p>
-          <a:p>
-            <a:endParaRPr lang="en-US" dirty="0">
-              <a:latin typeface="Helvetica" pitchFamily="2" charset="0"/>
-            </a:endParaRPr>
-          </a:p>
-          <a:p>
-            <a:pPr marL="342900" indent="-342900">
-              <a:buAutoNum type="arabicPeriod"/>
-            </a:pPr>
-            <a:r>
-              <a:rPr lang="en-US" dirty="0">
-                <a:latin typeface="Helvetica" pitchFamily="2" charset="0"/>
-              </a:rPr>
-              <a:t>What did you like about this workshop?</a:t>
-            </a:r>
-          </a:p>
-          <a:p>
-            <a:pPr marL="342900" indent="-342900">
-              <a:buAutoNum type="arabicPeriod"/>
-            </a:pPr>
-            <a:r>
-              <a:rPr lang="en-US" dirty="0">
-                <a:latin typeface="Helvetica" pitchFamily="2" charset="0"/>
-              </a:rPr>
-              <a:t>What could be improved?</a:t>
-            </a:r>
-          </a:p>
-          <a:p>
-            <a:pPr marL="342900" indent="-342900">
-              <a:buAutoNum type="arabicPeriod"/>
-            </a:pPr>
-            <a:r>
-              <a:rPr lang="en-US" dirty="0">
-                <a:latin typeface="Helvetica" pitchFamily="2" charset="0"/>
-              </a:rPr>
-              <a:t>Any suggestions for the following sessions (i.e. change in order, other topics, special interests)</a:t>
-            </a:r>
-          </a:p>
-        </p:txBody>
-      </p:sp>
-      <p:pic>
-        <p:nvPicPr>
-          <p:cNvPr id="5122" name="Picture 2" descr="Pen Icon Graphic by rudezstudio · Creative Fabrica">
-            <a:extLst>
-              <a:ext uri="{FF2B5EF4-FFF2-40B4-BE49-F238E27FC236}">
-                <a16:creationId xmlns:a16="http://schemas.microsoft.com/office/drawing/2014/main" id="{0DEEB3E2-D200-94F1-EB2C-1F94DD52C3EE}"/>
-              </a:ext>
-            </a:extLst>
-          </p:cNvPr>
-          <p:cNvPicPr>
-            <a:picLocks noChangeAspect="1" noChangeArrowheads="1"/>
-          </p:cNvPicPr>
-          <p:nvPr/>
-        </p:nvPicPr>
-        <p:blipFill>
-          <a:blip r:embed="rId3">
-            <a:extLst>
-              <a:ext uri="{28A0092B-C50C-407E-A947-70E740481C1C}">
-                <a14:useLocalDpi xmlns:a14="http://schemas.microsoft.com/office/drawing/2010/main" val="0"/>
-              </a:ext>
-            </a:extLst>
-          </a:blip>
-          <a:srcRect/>
-          <a:stretch>
-            <a:fillRect/>
-          </a:stretch>
-        </p:blipFill>
-        <p:spPr bwMode="auto">
-          <a:xfrm>
-            <a:off x="6521365" y="340845"/>
-            <a:ext cx="1576712" cy="1049329"/>
-          </a:xfrm>
-          <a:prstGeom prst="rect">
-            <a:avLst/>
-          </a:prstGeom>
-          <a:noFill/>
-          <a:extLst>
-            <a:ext uri="{909E8E84-426E-40DD-AFC4-6F175D3DCCD1}">
-              <a14:hiddenFill xmlns:a14="http://schemas.microsoft.com/office/drawing/2010/main">
-                <a:solidFill>
-                  <a:srgbClr val="FFFFFF"/>
-                </a:solidFill>
-              </a14:hiddenFill>
-            </a:ext>
-          </a:extLst>
-        </p:spPr>
-      </p:pic>
-    </p:spTree>
-    <p:extLst>
-      <p:ext uri="{BB962C8B-B14F-4D97-AF65-F5344CB8AC3E}">
-        <p14:creationId xmlns:p14="http://schemas.microsoft.com/office/powerpoint/2010/main" val="2528438318"/>
-      </p:ext>
-    </p:extLst>
-  </p:cSld>
-  <p:clrMapOvr>
-    <a:masterClrMapping/>
-  </p:clrMapOvr>
-</p:sld>
-</file>
-
-<file path=ppt/slides/slide3.xml><?xml version="1.0" encoding="utf-8"?>
 <p:sld xmlns:a="http://schemas.openxmlformats.org/drawingml/2006/main" xmlns:r="http://schemas.openxmlformats.org/officeDocument/2006/relationships" xmlns:p="http://schemas.openxmlformats.org/presentationml/2006/main">
   <p:cSld>
     <p:spTree>
@@ -10238,7 +9667,7 @@
 </p:sld>
 </file>
 
-<file path=ppt/slides/slide4.xml><?xml version="1.0" encoding="utf-8"?>
+<file path=ppt/slides/slide3.xml><?xml version="1.0" encoding="utf-8"?>
 <p:sld xmlns:a="http://schemas.openxmlformats.org/drawingml/2006/main" xmlns:r="http://schemas.openxmlformats.org/officeDocument/2006/relationships" xmlns:p="http://schemas.openxmlformats.org/presentationml/2006/main">
   <p:cSld>
     <p:spTree>
@@ -10377,7 +9806,7 @@
 </p:sld>
 </file>
 
-<file path=ppt/slides/slide5.xml><?xml version="1.0" encoding="utf-8"?>
+<file path=ppt/slides/slide4.xml><?xml version="1.0" encoding="utf-8"?>
 <p:sld xmlns:a="http://schemas.openxmlformats.org/drawingml/2006/main" xmlns:r="http://schemas.openxmlformats.org/officeDocument/2006/relationships" xmlns:p="http://schemas.openxmlformats.org/presentationml/2006/main">
   <p:cSld>
     <p:spTree>
@@ -12061,7 +11490,7 @@
 </p:sld>
 </file>
 
-<file path=ppt/slides/slide6.xml><?xml version="1.0" encoding="utf-8"?>
+<file path=ppt/slides/slide5.xml><?xml version="1.0" encoding="utf-8"?>
 <p:sld xmlns:a="http://schemas.openxmlformats.org/drawingml/2006/main" xmlns:r="http://schemas.openxmlformats.org/officeDocument/2006/relationships" xmlns:p="http://schemas.openxmlformats.org/presentationml/2006/main">
   <p:cSld>
     <p:spTree>
@@ -14360,7 +13789,7 @@
 </p:sld>
 </file>
 
-<file path=ppt/slides/slide7.xml><?xml version="1.0" encoding="utf-8"?>
+<file path=ppt/slides/slide6.xml><?xml version="1.0" encoding="utf-8"?>
 <p:sld xmlns:a="http://schemas.openxmlformats.org/drawingml/2006/main" xmlns:r="http://schemas.openxmlformats.org/officeDocument/2006/relationships" xmlns:p="http://schemas.openxmlformats.org/presentationml/2006/main">
   <p:cSld>
     <p:spTree>
@@ -16320,7 +15749,7 @@
 </p:sld>
 </file>
 
-<file path=ppt/slides/slide8.xml><?xml version="1.0" encoding="utf-8"?>
+<file path=ppt/slides/slide7.xml><?xml version="1.0" encoding="utf-8"?>
 <p:sld xmlns:a="http://schemas.openxmlformats.org/drawingml/2006/main" xmlns:r="http://schemas.openxmlformats.org/officeDocument/2006/relationships" xmlns:p="http://schemas.openxmlformats.org/presentationml/2006/main">
   <p:cSld>
     <p:spTree>
@@ -16498,7 +15927,7 @@
 </p:sld>
 </file>
 
-<file path=ppt/slides/slide9.xml><?xml version="1.0" encoding="utf-8"?>
+<file path=ppt/slides/slide8.xml><?xml version="1.0" encoding="utf-8"?>
 <p:sld xmlns:a="http://schemas.openxmlformats.org/drawingml/2006/main" xmlns:r="http://schemas.openxmlformats.org/officeDocument/2006/relationships" xmlns:p="http://schemas.openxmlformats.org/presentationml/2006/main">
   <p:cSld>
     <p:spTree>
@@ -16702,6 +16131,437 @@
     <p:extLst>
       <p:ext uri="{BB962C8B-B14F-4D97-AF65-F5344CB8AC3E}">
         <p14:creationId xmlns:p14="http://schemas.microsoft.com/office/powerpoint/2010/main" val="1598883892"/>
+      </p:ext>
+    </p:extLst>
+  </p:cSld>
+  <p:clrMapOvr>
+    <a:masterClrMapping/>
+  </p:clrMapOvr>
+</p:sld>
+</file>
+
+<file path=ppt/slides/slide9.xml><?xml version="1.0" encoding="utf-8"?>
+<p:sld xmlns:a="http://schemas.openxmlformats.org/drawingml/2006/main" xmlns:r="http://schemas.openxmlformats.org/officeDocument/2006/relationships" xmlns:p="http://schemas.openxmlformats.org/presentationml/2006/main">
+  <p:cSld>
+    <p:spTree>
+      <p:nvGrpSpPr>
+        <p:cNvPr id="1" name="">
+          <a:extLst>
+            <a:ext uri="{FF2B5EF4-FFF2-40B4-BE49-F238E27FC236}">
+              <a16:creationId xmlns:a16="http://schemas.microsoft.com/office/drawing/2014/main" id="{3BC51CAB-FAD2-7FF1-BC68-38E813D536B3}"/>
+            </a:ext>
+          </a:extLst>
+        </p:cNvPr>
+        <p:cNvGrpSpPr/>
+        <p:nvPr/>
+      </p:nvGrpSpPr>
+      <p:grpSpPr>
+        <a:xfrm>
+          <a:off x="0" y="0"/>
+          <a:ext cx="0" cy="0"/>
+          <a:chOff x="0" y="0"/>
+          <a:chExt cx="0" cy="0"/>
+        </a:xfrm>
+      </p:grpSpPr>
+      <p:sp>
+        <p:nvSpPr>
+          <p:cNvPr id="4" name="Title 1">
+            <a:extLst>
+              <a:ext uri="{FF2B5EF4-FFF2-40B4-BE49-F238E27FC236}">
+                <a16:creationId xmlns:a16="http://schemas.microsoft.com/office/drawing/2014/main" id="{AAFC316A-7B0B-9218-42CC-A39620399B02}"/>
+              </a:ext>
+            </a:extLst>
+          </p:cNvPr>
+          <p:cNvSpPr>
+            <a:spLocks noGrp="1"/>
+          </p:cNvSpPr>
+          <p:nvPr>
+            <p:ph type="title"/>
+          </p:nvPr>
+        </p:nvSpPr>
+        <p:spPr>
+          <a:xfrm>
+            <a:off x="838200" y="365125"/>
+            <a:ext cx="10515600" cy="1325563"/>
+          </a:xfrm>
+        </p:spPr>
+        <p:txBody>
+          <a:bodyPr>
+            <a:normAutofit/>
+          </a:bodyPr>
+          <a:lstStyle/>
+          <a:p>
+            <a:r>
+              <a:rPr lang="en-US" sz="4000" dirty="0">
+                <a:latin typeface="Helvetica" pitchFamily="2" charset="0"/>
+              </a:rPr>
+              <a:t>Anatomy of the job array</a:t>
+            </a:r>
+          </a:p>
+        </p:txBody>
+      </p:sp>
+      <p:pic>
+        <p:nvPicPr>
+          <p:cNvPr id="5" name="Picture 4">
+            <a:extLst>
+              <a:ext uri="{FF2B5EF4-FFF2-40B4-BE49-F238E27FC236}">
+                <a16:creationId xmlns:a16="http://schemas.microsoft.com/office/drawing/2014/main" id="{B11660AB-6D04-175F-931A-3468DB851DC2}"/>
+              </a:ext>
+            </a:extLst>
+          </p:cNvPr>
+          <p:cNvPicPr>
+            <a:picLocks noChangeAspect="1"/>
+          </p:cNvPicPr>
+          <p:nvPr/>
+        </p:nvPicPr>
+        <p:blipFill>
+          <a:blip r:embed="rId2"/>
+          <a:stretch>
+            <a:fillRect/>
+          </a:stretch>
+        </p:blipFill>
+        <p:spPr>
+          <a:xfrm>
+            <a:off x="363255" y="2066907"/>
+            <a:ext cx="5847443" cy="4033678"/>
+          </a:xfrm>
+          <a:prstGeom prst="rect">
+            <a:avLst/>
+          </a:prstGeom>
+        </p:spPr>
+      </p:pic>
+      <p:pic>
+        <p:nvPicPr>
+          <p:cNvPr id="2050" name="Picture 2" descr="Cook: What it Takes to Make It in a Michelin-Starred Restaurant">
+            <a:extLst>
+              <a:ext uri="{FF2B5EF4-FFF2-40B4-BE49-F238E27FC236}">
+                <a16:creationId xmlns:a16="http://schemas.microsoft.com/office/drawing/2014/main" id="{7FEA96AA-52BF-BE32-FA66-0B1AD763CAC6}"/>
+              </a:ext>
+            </a:extLst>
+          </p:cNvPr>
+          <p:cNvPicPr>
+            <a:picLocks noChangeAspect="1" noChangeArrowheads="1"/>
+          </p:cNvPicPr>
+          <p:nvPr/>
+        </p:nvPicPr>
+        <p:blipFill>
+          <a:blip r:embed="rId3">
+            <a:extLst>
+              <a:ext uri="{28A0092B-C50C-407E-A947-70E740481C1C}">
+                <a14:useLocalDpi xmlns:a14="http://schemas.microsoft.com/office/drawing/2010/main" val="0"/>
+              </a:ext>
+            </a:extLst>
+          </a:blip>
+          <a:srcRect/>
+          <a:stretch>
+            <a:fillRect/>
+          </a:stretch>
+        </p:blipFill>
+        <p:spPr bwMode="auto">
+          <a:xfrm>
+            <a:off x="7310221" y="2293481"/>
+            <a:ext cx="2018047" cy="1135519"/>
+          </a:xfrm>
+          <a:prstGeom prst="rect">
+            <a:avLst/>
+          </a:prstGeom>
+          <a:noFill/>
+          <a:extLst>
+            <a:ext uri="{909E8E84-426E-40DD-AFC4-6F175D3DCCD1}">
+              <a14:hiddenFill xmlns:a14="http://schemas.microsoft.com/office/drawing/2010/main">
+                <a:solidFill>
+                  <a:srgbClr val="FFFFFF"/>
+                </a:solidFill>
+              </a14:hiddenFill>
+            </a:ext>
+          </a:extLst>
+        </p:spPr>
+      </p:pic>
+      <p:pic>
+        <p:nvPicPr>
+          <p:cNvPr id="2052" name="Picture 4" descr="From Home Cook to Haute Cuisine: My Experience Staging in a Michelin-Starred  Kitchen as an Amateur Chef | by Kevinjchen | Medium">
+            <a:extLst>
+              <a:ext uri="{FF2B5EF4-FFF2-40B4-BE49-F238E27FC236}">
+                <a16:creationId xmlns:a16="http://schemas.microsoft.com/office/drawing/2014/main" id="{2D1B33F3-6BA6-FAFE-91B4-0FEE51743972}"/>
+              </a:ext>
+            </a:extLst>
+          </p:cNvPr>
+          <p:cNvPicPr>
+            <a:picLocks noChangeAspect="1" noChangeArrowheads="1"/>
+          </p:cNvPicPr>
+          <p:nvPr/>
+        </p:nvPicPr>
+        <p:blipFill>
+          <a:blip r:embed="rId4">
+            <a:extLst>
+              <a:ext uri="{28A0092B-C50C-407E-A947-70E740481C1C}">
+                <a14:useLocalDpi xmlns:a14="http://schemas.microsoft.com/office/drawing/2010/main" val="0"/>
+              </a:ext>
+            </a:extLst>
+          </a:blip>
+          <a:srcRect/>
+          <a:stretch>
+            <a:fillRect/>
+          </a:stretch>
+        </p:blipFill>
+        <p:spPr bwMode="auto">
+          <a:xfrm>
+            <a:off x="7388361" y="5079051"/>
+            <a:ext cx="1861766" cy="1396325"/>
+          </a:xfrm>
+          <a:prstGeom prst="rect">
+            <a:avLst/>
+          </a:prstGeom>
+          <a:noFill/>
+          <a:extLst>
+            <a:ext uri="{909E8E84-426E-40DD-AFC4-6F175D3DCCD1}">
+              <a14:hiddenFill xmlns:a14="http://schemas.microsoft.com/office/drawing/2010/main">
+                <a:solidFill>
+                  <a:srgbClr val="FFFFFF"/>
+                </a:solidFill>
+              </a14:hiddenFill>
+            </a:ext>
+          </a:extLst>
+        </p:spPr>
+      </p:pic>
+      <p:pic>
+        <p:nvPicPr>
+          <p:cNvPr id="2054" name="Picture 6" descr="Recipe - Free food icons">
+            <a:extLst>
+              <a:ext uri="{FF2B5EF4-FFF2-40B4-BE49-F238E27FC236}">
+                <a16:creationId xmlns:a16="http://schemas.microsoft.com/office/drawing/2014/main" id="{C98011D2-CAD8-7FE0-EC2D-DCF169E6ED16}"/>
+              </a:ext>
+            </a:extLst>
+          </p:cNvPr>
+          <p:cNvPicPr>
+            <a:picLocks noChangeAspect="1" noChangeArrowheads="1"/>
+          </p:cNvPicPr>
+          <p:nvPr/>
+        </p:nvPicPr>
+        <p:blipFill>
+          <a:blip r:embed="rId5">
+            <a:extLst>
+              <a:ext uri="{28A0092B-C50C-407E-A947-70E740481C1C}">
+                <a14:useLocalDpi xmlns:a14="http://schemas.microsoft.com/office/drawing/2010/main" val="0"/>
+              </a:ext>
+            </a:extLst>
+          </a:blip>
+          <a:srcRect/>
+          <a:stretch>
+            <a:fillRect/>
+          </a:stretch>
+        </p:blipFill>
+        <p:spPr bwMode="auto">
+          <a:xfrm>
+            <a:off x="7888836" y="3814153"/>
+            <a:ext cx="860816" cy="860816"/>
+          </a:xfrm>
+          <a:prstGeom prst="rect">
+            <a:avLst/>
+          </a:prstGeom>
+          <a:noFill/>
+          <a:extLst>
+            <a:ext uri="{909E8E84-426E-40DD-AFC4-6F175D3DCCD1}">
+              <a14:hiddenFill xmlns:a14="http://schemas.microsoft.com/office/drawing/2010/main">
+                <a:solidFill>
+                  <a:srgbClr val="FFFFFF"/>
+                </a:solidFill>
+              </a14:hiddenFill>
+            </a:ext>
+          </a:extLst>
+        </p:spPr>
+      </p:pic>
+      <p:sp>
+        <p:nvSpPr>
+          <p:cNvPr id="6" name="TextBox 5">
+            <a:extLst>
+              <a:ext uri="{FF2B5EF4-FFF2-40B4-BE49-F238E27FC236}">
+                <a16:creationId xmlns:a16="http://schemas.microsoft.com/office/drawing/2014/main" id="{7513C32E-83D2-918A-D574-6F8C0A89F532}"/>
+              </a:ext>
+            </a:extLst>
+          </p:cNvPr>
+          <p:cNvSpPr txBox="1"/>
+          <p:nvPr/>
+        </p:nvSpPr>
+        <p:spPr>
+          <a:xfrm>
+            <a:off x="9541056" y="908306"/>
+            <a:ext cx="2597762" cy="369332"/>
+          </a:xfrm>
+          <a:prstGeom prst="rect">
+            <a:avLst/>
+          </a:prstGeom>
+          <a:noFill/>
+        </p:spPr>
+        <p:txBody>
+          <a:bodyPr wrap="none" rtlCol="0">
+            <a:spAutoFit/>
+          </a:bodyPr>
+          <a:lstStyle/>
+          <a:p>
+            <a:r>
+              <a:rPr lang="en-US" dirty="0"/>
+              <a:t>Config (list of ingredients)</a:t>
+            </a:r>
+          </a:p>
+        </p:txBody>
+      </p:sp>
+      <p:sp>
+        <p:nvSpPr>
+          <p:cNvPr id="7" name="TextBox 6">
+            <a:extLst>
+              <a:ext uri="{FF2B5EF4-FFF2-40B4-BE49-F238E27FC236}">
+                <a16:creationId xmlns:a16="http://schemas.microsoft.com/office/drawing/2014/main" id="{84CB02A7-375F-F658-3288-1560DAD0A278}"/>
+              </a:ext>
+            </a:extLst>
+          </p:cNvPr>
+          <p:cNvSpPr txBox="1"/>
+          <p:nvPr/>
+        </p:nvSpPr>
+        <p:spPr>
+          <a:xfrm>
+            <a:off x="9541056" y="2491908"/>
+            <a:ext cx="2175339" cy="369332"/>
+          </a:xfrm>
+          <a:prstGeom prst="rect">
+            <a:avLst/>
+          </a:prstGeom>
+          <a:noFill/>
+        </p:spPr>
+        <p:txBody>
+          <a:bodyPr wrap="none" rtlCol="0">
+            <a:spAutoFit/>
+          </a:bodyPr>
+          <a:lstStyle/>
+          <a:p>
+            <a:r>
+              <a:rPr lang="en-US" dirty="0"/>
+              <a:t>Launcher (head chef)</a:t>
+            </a:r>
+          </a:p>
+        </p:txBody>
+      </p:sp>
+      <p:sp>
+        <p:nvSpPr>
+          <p:cNvPr id="8" name="TextBox 7">
+            <a:extLst>
+              <a:ext uri="{FF2B5EF4-FFF2-40B4-BE49-F238E27FC236}">
+                <a16:creationId xmlns:a16="http://schemas.microsoft.com/office/drawing/2014/main" id="{CAFB727D-65BA-003B-6D9D-51FEA14820E1}"/>
+              </a:ext>
+            </a:extLst>
+          </p:cNvPr>
+          <p:cNvSpPr txBox="1"/>
+          <p:nvPr/>
+        </p:nvSpPr>
+        <p:spPr>
+          <a:xfrm>
+            <a:off x="9541056" y="5445321"/>
+            <a:ext cx="1316001" cy="369332"/>
+          </a:xfrm>
+          <a:prstGeom prst="rect">
+            <a:avLst/>
+          </a:prstGeom>
+          <a:noFill/>
+        </p:spPr>
+        <p:txBody>
+          <a:bodyPr wrap="none" rtlCol="0">
+            <a:spAutoFit/>
+          </a:bodyPr>
+          <a:lstStyle/>
+          <a:p>
+            <a:r>
+              <a:rPr lang="en-US" dirty="0"/>
+              <a:t>Jobs (cooks)</a:t>
+            </a:r>
+          </a:p>
+        </p:txBody>
+      </p:sp>
+      <p:sp>
+        <p:nvSpPr>
+          <p:cNvPr id="9" name="TextBox 8">
+            <a:extLst>
+              <a:ext uri="{FF2B5EF4-FFF2-40B4-BE49-F238E27FC236}">
+                <a16:creationId xmlns:a16="http://schemas.microsoft.com/office/drawing/2014/main" id="{46EF83B4-13A6-98E5-238A-51509D056599}"/>
+              </a:ext>
+            </a:extLst>
+          </p:cNvPr>
+          <p:cNvSpPr txBox="1"/>
+          <p:nvPr/>
+        </p:nvSpPr>
+        <p:spPr>
+          <a:xfrm>
+            <a:off x="9541056" y="4124961"/>
+            <a:ext cx="1847750" cy="369332"/>
+          </a:xfrm>
+          <a:prstGeom prst="rect">
+            <a:avLst/>
+          </a:prstGeom>
+          <a:noFill/>
+        </p:spPr>
+        <p:txBody>
+          <a:bodyPr wrap="none" rtlCol="0">
+            <a:spAutoFit/>
+          </a:bodyPr>
+          <a:lstStyle/>
+          <a:p>
+            <a:r>
+              <a:rPr lang="en-US" dirty="0"/>
+              <a:t>Job script (recipe)</a:t>
+            </a:r>
+          </a:p>
+        </p:txBody>
+      </p:sp>
+      <p:pic>
+        <p:nvPicPr>
+          <p:cNvPr id="2058" name="Picture 10" descr="1,736 Ingredients List Icon Royalty-Free Images, Stock Photos &amp; Pictures |  Shutterstock">
+            <a:extLst>
+              <a:ext uri="{FF2B5EF4-FFF2-40B4-BE49-F238E27FC236}">
+                <a16:creationId xmlns:a16="http://schemas.microsoft.com/office/drawing/2014/main" id="{6BF7B0B8-FB97-67C5-231E-6B5D0D68E510}"/>
+              </a:ext>
+            </a:extLst>
+          </p:cNvPr>
+          <p:cNvPicPr>
+            <a:picLocks noChangeAspect="1" noChangeArrowheads="1"/>
+          </p:cNvPicPr>
+          <p:nvPr/>
+        </p:nvPicPr>
+        <p:blipFill rotWithShape="1">
+          <a:blip r:embed="rId6">
+            <a:extLst>
+              <a:ext uri="{28A0092B-C50C-407E-A947-70E740481C1C}">
+                <a14:useLocalDpi xmlns:a14="http://schemas.microsoft.com/office/drawing/2010/main" val="0"/>
+              </a:ext>
+            </a:extLst>
+          </a:blip>
+          <a:srcRect b="12082"/>
+          <a:stretch>
+            <a:fillRect/>
+          </a:stretch>
+        </p:blipFill>
+        <p:spPr bwMode="auto">
+          <a:xfrm>
+            <a:off x="7544377" y="294257"/>
+            <a:ext cx="1549734" cy="1467298"/>
+          </a:xfrm>
+          <a:prstGeom prst="rect">
+            <a:avLst/>
+          </a:prstGeom>
+          <a:noFill/>
+          <a:extLst>
+            <a:ext uri="{909E8E84-426E-40DD-AFC4-6F175D3DCCD1}">
+              <a14:hiddenFill xmlns:a14="http://schemas.microsoft.com/office/drawing/2010/main">
+                <a:solidFill>
+                  <a:srgbClr val="FFFFFF"/>
+                </a:solidFill>
+              </a14:hiddenFill>
+            </a:ext>
+          </a:extLst>
+        </p:spPr>
+      </p:pic>
+    </p:spTree>
+    <p:extLst>
+      <p:ext uri="{BB962C8B-B14F-4D97-AF65-F5344CB8AC3E}">
+        <p14:creationId xmlns:p14="http://schemas.microsoft.com/office/powerpoint/2010/main" val="1633823878"/>
       </p:ext>
     </p:extLst>
   </p:cSld>
